--- a/How the MOA sourcing engine works.pptx
+++ b/How the MOA sourcing engine works.pptx
@@ -1001,7 +1001,19 @@
           <a:lstStyle/>
           <a:p>
             <a:r>
-              <a:t>The 2026 programme was used as a stand-in, which is why the dates read March 2026. In practice you would drop in the 2027 export. Note that the matches shown are real rows from that file — Brian Moser, Can Liu and Jin Zhou are genuinely presenting at those poster numbers.</a:t>
+              <a:t>This replaces the old version of this slide, which framed the payoff as the ASCPT meeting. The meeting is one channel for reaching the person; finding the person is the job.</a:t>
+            </a:r>
+          </a:p>
+          <a:p/>
+          <a:p>
+            <a:r>
+              <a:t>Every name here is real output. The pivekimab example is the important one: a naive 'take the first author' rule returns an MD Anderson oncologist, which is exactly the wrong person to invite to write a clinical pharmacology mini-review.</a:t>
+            </a:r>
+          </a:p>
+          <a:p/>
+          <a:p>
+            <a:r>
+              <a:t>The tool also harvests corresponding-author emails from the affiliation string when PubMed carries them.</a:t>
             </a:r>
           </a:p>
         </p:txBody>
@@ -4292,7 +4304,7 @@
                 </a:solidFill>
                 <a:latin typeface="Arial"/>
               </a:rPr>
-              <a:t>A small program that watches every FDA approval, keeps only the genuinely novel agents, ranks them for the MOA mini-review series, and once a year tells you which sponsors will be standing at which poster at the ASCPT Annual Meeting.</a:t>
+              <a:t>A small program that watches every FDA approval, keeps only the genuinely novel agents, ranks them for the MOA mini-review series, and then names the clinical pharmacologist at the company who actually worked on each drug.</a:t>
             </a:r>
           </a:p>
         </p:txBody>
@@ -4761,7 +4773,7 @@
                 </a:solidFill>
                 <a:latin typeface="Arial"/>
               </a:rPr>
-              <a:t>25</a:t>
+              <a:t>27</a:t>
             </a:r>
           </a:p>
           <a:p>
@@ -4802,7 +4814,7 @@
                 </a:solidFill>
                 <a:latin typeface="Arial"/>
               </a:rPr>
-              <a:t>18/19</a:t>
+              <a:t>24</a:t>
             </a:r>
           </a:p>
           <a:p>
@@ -4824,7 +4836,7 @@
                 </a:solidFill>
                 <a:latin typeface="Arial"/>
               </a:rPr>
-              <a:t>published MOA papers the filter would have found</a:t>
+              <a:t>with a named clinical pharmacologist to write to</a:t>
             </a:r>
           </a:p>
           <a:p>
@@ -4843,7 +4855,7 @@
                 </a:solidFill>
                 <a:latin typeface="Arial"/>
               </a:rPr>
-              <a:t>10</a:t>
+              <a:t>18/19</a:t>
             </a:r>
           </a:p>
           <a:p>
@@ -4865,7 +4877,7 @@
                 </a:solidFill>
                 <a:latin typeface="Arial"/>
               </a:rPr>
-              <a:t>candidates with named ASCPT contacts</a:t>
+              <a:t>published MOA papers the filter would have found</a:t>
             </a:r>
           </a:p>
         </p:txBody>
@@ -5150,8 +5162,8 @@
         </p:nvSpPr>
         <p:spPr>
           <a:xfrm>
-            <a:off x="566928" y="1627632"/>
-            <a:ext cx="5623560" cy="3108960"/>
+            <a:off x="566928" y="1572768"/>
+            <a:ext cx="5623560" cy="3200400"/>
           </a:xfrm>
           <a:prstGeom prst="rect">
             <a:avLst/>
@@ -5169,11 +5181,11 @@
                 <a:spcPct val="106000"/>
               </a:lnSpc>
               <a:spcAft>
-                <a:spcPts val="800"/>
-              </a:spcAft>
-            </a:pPr>
-            <a:r>
-              <a:rPr sz="1050" b="1">
+                <a:spcPts val="600"/>
+              </a:spcAft>
+            </a:pPr>
+            <a:r>
+              <a:rPr sz="1000" b="1">
                 <a:solidFill>
                   <a:srgbClr val="1C222B"/>
                 </a:solidFill>
@@ -5182,7 +5194,7 @@
               <a:t>— EUA products are invisible </a:t>
             </a:r>
             <a:r>
-              <a:rPr sz="1050">
+              <a:rPr sz="1000">
                 <a:solidFill>
                   <a:srgbClr val="535C69"/>
                 </a:solidFill>
@@ -5197,11 +5209,11 @@
                 <a:spcPct val="106000"/>
               </a:lnSpc>
               <a:spcAft>
-                <a:spcPts val="800"/>
-              </a:spcAft>
-            </a:pPr>
-            <a:r>
-              <a:rPr sz="1050" b="1">
+                <a:spcPts val="600"/>
+              </a:spcAft>
+            </a:pPr>
+            <a:r>
+              <a:rPr sz="1000" b="1">
                 <a:solidFill>
                   <a:srgbClr val="1C222B"/>
                 </a:solidFill>
@@ -5210,7 +5222,7 @@
               <a:t>— Route data is imperfect </a:t>
             </a:r>
             <a:r>
-              <a:rPr sz="1050">
+              <a:rPr sz="1000">
                 <a:solidFill>
                   <a:srgbClr val="535C69"/>
                 </a:solidFill>
@@ -5225,26 +5237,26 @@
                 <a:spcPct val="106000"/>
               </a:lnSpc>
               <a:spcAft>
-                <a:spcPts val="800"/>
-              </a:spcAft>
-            </a:pPr>
-            <a:r>
-              <a:rPr sz="1050" b="1">
+                <a:spcPts val="600"/>
+              </a:spcAft>
+            </a:pPr>
+            <a:r>
+              <a:rPr sz="1000" b="1">
                 <a:solidFill>
                   <a:srgbClr val="1C222B"/>
                 </a:solidFill>
                 <a:latin typeface="Arial"/>
               </a:rPr>
-              <a:t>— Contacts are mostly missing </a:t>
-            </a:r>
-            <a:r>
-              <a:rPr sz="1050">
+              <a:t>— Names come from the literature, not a staff list </a:t>
+            </a:r>
+            <a:r>
+              <a:rPr sz="1000">
                 <a:solidFill>
                   <a:srgbClr val="535C69"/>
                 </a:solidFill>
                 <a:latin typeface="Arial"/>
               </a:rPr>
-              <a:t>— 20 of 25 current candidates read NEEDS LOOKUP, because the contact grid has almost no names in it</a:t>
+              <a:t>— someone who never published on the drug is invisible, and 3 of 27 candidates are too new to have any papers at all</a:t>
             </a:r>
           </a:p>
           <a:p>
@@ -5253,26 +5265,26 @@
                 <a:spcPct val="106000"/>
               </a:lnSpc>
               <a:spcAft>
-                <a:spcPts val="800"/>
-              </a:spcAft>
-            </a:pPr>
-            <a:r>
-              <a:rPr sz="1050" b="1">
+                <a:spcPts val="600"/>
+              </a:spcAft>
+            </a:pPr>
+            <a:r>
+              <a:rPr sz="1000" b="1">
                 <a:solidFill>
                   <a:srgbClr val="1C222B"/>
                 </a:solidFill>
                 <a:latin typeface="Arial"/>
               </a:rPr>
-              <a:t>— Programme matches are leads, not facts </a:t>
-            </a:r>
-            <a:r>
-              <a:rPr sz="1050">
+              <a:t>— Affiliations are as at publication </a:t>
+            </a:r>
+            <a:r>
+              <a:rPr sz="1000">
                 <a:solidFill>
                   <a:srgbClr val="535C69"/>
                 </a:solidFill>
                 <a:latin typeface="Arial"/>
               </a:rPr>
-              <a:t>— “sponsor presenting” means someone from that company has a poster</a:t>
+              <a:t>— people move; the tool flags it but cannot confirm where they are now</a:t>
             </a:r>
           </a:p>
           <a:p>
@@ -5281,20 +5293,76 @@
                 <a:spcPct val="106000"/>
               </a:lnSpc>
               <a:spcAft>
-                <a:spcPts val="800"/>
-              </a:spcAft>
-            </a:pPr>
-            <a:r>
-              <a:rPr sz="1050" b="1">
+                <a:spcPts val="600"/>
+              </a:spcAft>
+            </a:pPr>
+            <a:r>
+              <a:rPr sz="1000" b="1">
                 <a:solidFill>
                   <a:srgbClr val="1C222B"/>
                 </a:solidFill>
                 <a:latin typeface="Arial"/>
               </a:rPr>
+              <a:t>— The ASCPT member directory is behind a login </a:t>
+            </a:r>
+            <a:r>
+              <a:rPr sz="1000">
+                <a:solidFill>
+                  <a:srgbClr val="535C69"/>
+                </a:solidFill>
+                <a:latin typeface="Arial"/>
+              </a:rPr>
+              <a:t>— it is never scraped. The tool writes a short check list of the specific names it wants an answer for, which you or ASCPT fill in</a:t>
+            </a:r>
+          </a:p>
+          <a:p>
+            <a:pPr>
+              <a:lnSpc>
+                <a:spcPct val="106000"/>
+              </a:lnSpc>
+              <a:spcAft>
+                <a:spcPts val="600"/>
+              </a:spcAft>
+            </a:pPr>
+            <a:r>
+              <a:rPr sz="1000" b="1">
+                <a:solidFill>
+                  <a:srgbClr val="1C222B"/>
+                </a:solidFill>
+                <a:latin typeface="Arial"/>
+              </a:rPr>
+              <a:t>— Programme matches are leads, not facts </a:t>
+            </a:r>
+            <a:r>
+              <a:rPr sz="1000">
+                <a:solidFill>
+                  <a:srgbClr val="535C69"/>
+                </a:solidFill>
+                <a:latin typeface="Arial"/>
+              </a:rPr>
+              <a:t>— “sponsor presenting” means someone from that company has a poster</a:t>
+            </a:r>
+          </a:p>
+          <a:p>
+            <a:pPr>
+              <a:lnSpc>
+                <a:spcPct val="106000"/>
+              </a:lnSpc>
+              <a:spcAft>
+                <a:spcPts val="600"/>
+              </a:spcAft>
+            </a:pPr>
+            <a:r>
+              <a:rPr sz="1000" b="1">
+                <a:solidFill>
+                  <a:srgbClr val="1C222B"/>
+                </a:solidFill>
+                <a:latin typeface="Arial"/>
+              </a:rPr>
               <a:t>— CBER depends on Purple Book lag </a:t>
             </a:r>
             <a:r>
-              <a:rPr sz="1050">
+              <a:rPr sz="1000">
                 <a:solidFill>
                   <a:srgbClr val="535C69"/>
                 </a:solidFill>
@@ -5313,8 +5381,8 @@
         </p:nvSpPr>
         <p:spPr>
           <a:xfrm>
-            <a:off x="566928" y="4846320"/>
-            <a:ext cx="5623560" cy="1234440"/>
+            <a:off x="566928" y="5029200"/>
+            <a:ext cx="5623560" cy="1097280"/>
           </a:xfrm>
           <a:prstGeom prst="rect">
             <a:avLst/>
@@ -5357,8 +5425,8 @@
         </p:nvSpPr>
         <p:spPr>
           <a:xfrm>
-            <a:off x="749808" y="4992624"/>
-            <a:ext cx="5257800" cy="1005840"/>
+            <a:off x="749808" y="5148072"/>
+            <a:ext cx="5257800" cy="914400"/>
           </a:xfrm>
           <a:prstGeom prst="rect">
             <a:avLst/>
@@ -8361,7 +8429,7 @@
             <a:avLst/>
           </a:prstGeom>
           <a:solidFill>
-            <a:srgbClr val="9DB6CE"/>
+            <a:srgbClr val="1F4E79"/>
           </a:solidFill>
           <a:ln>
             <a:noFill/>
@@ -8421,7 +8489,7 @@
             <a:r>
               <a:rPr sz="900" b="1" i="0">
                 <a:solidFill>
-                  <a:srgbClr val="9DB6CE"/>
+                  <a:srgbClr val="1F4E79"/>
                 </a:solidFill>
                 <a:latin typeface="Arial"/>
               </a:rPr>
@@ -8447,7 +8515,7 @@
                 </a:solidFill>
                 <a:latin typeface="Arial"/>
               </a:rPr>
-              <a:t>Who could write it?</a:t>
+              <a:t>Who worked on it?</a:t>
             </a:r>
           </a:p>
           <a:p>
@@ -8469,7 +8537,7 @@
                 </a:solidFill>
                 <a:latin typeface="Arial"/>
               </a:rPr>
-              <a:t>· PubMed prior-review check</a:t>
+              <a:t>· Phase 1 clin pharm papers</a:t>
             </a:r>
           </a:p>
           <a:p>
@@ -8491,7 +8559,7 @@
                 </a:solidFill>
                 <a:latin typeface="Arial"/>
               </a:rPr>
-              <a:t>· candidate authors</a:t>
+              <a:t>· author affiliations</a:t>
             </a:r>
           </a:p>
         </p:txBody>
@@ -9203,7 +9271,7 @@
                 </a:solidFill>
                 <a:latin typeface="Arial"/>
               </a:rPr>
-              <a:t>ASCPT recruiting dossier</a:t>
+              <a:t>MOA author outreach list</a:t>
             </a:r>
           </a:p>
           <a:p>
@@ -9225,7 +9293,7 @@
                 </a:solidFill>
                 <a:latin typeface="Arial"/>
               </a:rPr>
-              <a:t>Ranked candidates joined to the meeting programme — poster numbers, times and the names of the people presenting.</a:t>
+              <a:t>Ranked candidates, each with the clinical pharmacologists to contact, why they were picked and the PubMed IDs behind it.</a:t>
             </a:r>
           </a:p>
         </p:txBody>
@@ -9422,7 +9490,7 @@
                 </a:solidFill>
                 <a:latin typeface="Arial"/>
               </a:rPr>
-              <a:t>Monthly — a light run tops up the queue so nothing is lost between meetings.  ·  Early February — the annual run builds the dossier about four weeks before ASCPT, in time to arrange conversations.</a:t>
+              <a:t>Monthly — a light run tops up the queue so nothing is lost.  ·  Whenever you are ready to write — build the outreach list and the letters. Before ASCPT, drop in the programme or attendee list and the same people gain a poster number and a time.</a:t>
             </a:r>
           </a:p>
         </p:txBody>
@@ -12869,7 +12937,7 @@
                 </a:solidFill>
                 <a:latin typeface="Arial"/>
               </a:rPr>
-              <a:t>The ASCPT dossier — who to find, and where</a:t>
+              <a:t>Who to write to — by name, with the evidence</a:t>
             </a:r>
           </a:p>
         </p:txBody>
@@ -12926,8 +12994,8 @@
         </p:nvSpPr>
         <p:spPr>
           <a:xfrm>
-            <a:off x="566928" y="1298448"/>
-            <a:ext cx="11057839" cy="384048"/>
+            <a:off x="566928" y="1280160"/>
+            <a:ext cx="11057839" cy="365760"/>
           </a:xfrm>
           <a:prstGeom prst="rect">
             <a:avLst/>
@@ -12958,7 +13026,7 @@
                 </a:solidFill>
                 <a:latin typeface="Arial"/>
               </a:rPr>
-              <a:t>Run about four weeks before the Annual Meeting. It joins the ranked queue to your programme export, so a candidate drug becomes a named person at a numbered poster at a known time.</a:t>
+              <a:t>The objective is reaching the clinical pharmacologist who actually worked on the drug. The tool finds them in PubMed and says why it picked them.</a:t>
             </a:r>
           </a:p>
         </p:txBody>
@@ -12971,8 +13039,8 @@
         </p:nvSpPr>
         <p:spPr>
           <a:xfrm>
-            <a:off x="566928" y="1810512"/>
-            <a:ext cx="11057839" cy="274320"/>
+            <a:off x="566928" y="1737360"/>
+            <a:ext cx="11057839" cy="237744"/>
           </a:xfrm>
           <a:prstGeom prst="rect">
             <a:avLst/>
@@ -13000,7 +13068,7 @@
                 </a:solidFill>
                 <a:latin typeface="Arial"/>
               </a:rPr>
-              <a:t>ACTUAL OUTPUT FROM THE CURRENT RUN</a:t>
+              <a:t>THREE PASSES — because author position means different things in different papers</a:t>
             </a:r>
           </a:p>
         </p:txBody>
@@ -13014,8 +13082,8 @@
           <p:nvPr/>
         </p:nvGraphicFramePr>
         <p:xfrm>
-          <a:off x="566928" y="2103120"/>
-          <a:ext cx="11057839" cy="1581912"/>
+          <a:off x="566928" y="2011680"/>
+          <a:ext cx="11057839" cy="1527048"/>
         </p:xfrm>
         <a:graphic>
           <a:graphicData uri="http://schemas.openxmlformats.org/drawingml/2006/table">
@@ -13024,11 +13092,9 @@
                 <a:tableStyleId>{5C22544A-7EE6-4342-B048-85BDC9FD1C3A}</a:tableStyleId>
               </a:tblPr>
               <a:tblGrid>
-                <a:gridCol w="384048"/>
-                <a:gridCol w="1737360"/>
-                <a:gridCol w="566928"/>
-                <a:gridCol w="621792"/>
-                <a:gridCol w="7747711"/>
+                <a:gridCol w="310896"/>
+                <a:gridCol w="5943600"/>
+                <a:gridCol w="4803343"/>
               </a:tblGrid>
               <a:tr h="265176">
                 <a:tc>
@@ -13045,13 +13111,13 @@
                         </a:spcAft>
                       </a:pPr>
                       <a:r>
-                        <a:rPr sz="1000" b="1">
+                        <a:rPr sz="950" b="1">
                           <a:solidFill>
                             <a:srgbClr val="1F4E79"/>
                           </a:solidFill>
                           <a:latin typeface="Arial"/>
                         </a:rPr>
-                        <a:t>#</a:t>
+                        <a:t> </a:t>
                       </a:r>
                     </a:p>
                   </a:txBody>
@@ -13075,13 +13141,13 @@
                         </a:spcAft>
                       </a:pPr>
                       <a:r>
-                        <a:rPr sz="1000" b="1">
+                        <a:rPr sz="950" b="1">
                           <a:solidFill>
                             <a:srgbClr val="1F4E79"/>
                           </a:solidFill>
                           <a:latin typeface="Arial"/>
                         </a:rPr>
-                        <a:t>Drug</a:t>
+                        <a:t>What it searches</a:t>
                       </a:r>
                     </a:p>
                   </a:txBody>
@@ -13105,13 +13171,13 @@
                         </a:spcAft>
                       </a:pPr>
                       <a:r>
-                        <a:rPr sz="1000" b="1">
+                        <a:rPr sz="950" b="1">
                           <a:solidFill>
                             <a:srgbClr val="1F4E79"/>
                           </a:solidFill>
                           <a:latin typeface="Arial"/>
                         </a:rPr>
-                        <a:t>Score</a:t>
+                        <a:t>Where the clinical pharmacologist sits</a:t>
                       </a:r>
                     </a:p>
                   </a:txBody>
@@ -13121,6 +13187,8 @@
                     </a:solidFill>
                   </a:tcPr>
                 </a:tc>
+              </a:tr>
+              <a:tr h="420624">
                 <a:tc>
                   <a:txBody>
                     <a:bodyPr wrap="square"/>
@@ -13135,69 +13203,7 @@
                         </a:spcAft>
                       </a:pPr>
                       <a:r>
-                        <a:rPr sz="1000" b="1">
-                          <a:solidFill>
-                            <a:srgbClr val="1F4E79"/>
-                          </a:solidFill>
-                          <a:latin typeface="Arial"/>
-                        </a:rPr>
-                        <a:t>Leads</a:t>
-                      </a:r>
-                    </a:p>
-                  </a:txBody>
-                  <a:tcPr marL="54864" marR="54864" marT="18288" marB="18288" anchor="ctr">
-                    <a:solidFill>
-                      <a:srgbClr val="E8EDF3"/>
-                    </a:solidFill>
-                  </a:tcPr>
-                </a:tc>
-                <a:tc>
-                  <a:txBody>
-                    <a:bodyPr wrap="square"/>
-                    <a:lstStyle/>
-                    <a:p>
-                      <a:pPr>
-                        <a:spcBef>
-                          <a:spcPts val="0"/>
-                        </a:spcBef>
-                        <a:spcAft>
-                          <a:spcPts val="0"/>
-                        </a:spcAft>
-                      </a:pPr>
-                      <a:r>
-                        <a:rPr sz="1000" b="1">
-                          <a:solidFill>
-                            <a:srgbClr val="1F4E79"/>
-                          </a:solidFill>
-                          <a:latin typeface="Arial"/>
-                        </a:rPr>
-                        <a:t>Who to find at the meeting</a:t>
-                      </a:r>
-                    </a:p>
-                  </a:txBody>
-                  <a:tcPr marL="54864" marR="54864" marT="18288" marB="18288" anchor="ctr">
-                    <a:solidFill>
-                      <a:srgbClr val="E8EDF3"/>
-                    </a:solidFill>
-                  </a:tcPr>
-                </a:tc>
-              </a:tr>
-              <a:tr h="329184">
-                <a:tc>
-                  <a:txBody>
-                    <a:bodyPr wrap="square"/>
-                    <a:lstStyle/>
-                    <a:p>
-                      <a:pPr>
-                        <a:spcBef>
-                          <a:spcPts val="0"/>
-                        </a:spcBef>
-                        <a:spcAft>
-                          <a:spcPts val="0"/>
-                        </a:spcAft>
-                      </a:pPr>
-                      <a:r>
-                        <a:rPr sz="1000" b="0">
+                        <a:rPr sz="950" b="0">
                           <a:solidFill>
                             <a:srgbClr val="1C222B"/>
                           </a:solidFill>
@@ -13227,13 +13233,13 @@
                         </a:spcAft>
                       </a:pPr>
                       <a:r>
-                        <a:rPr sz="1000" b="0">
+                        <a:rPr sz="950" b="0">
                           <a:solidFill>
                             <a:srgbClr val="1C222B"/>
                           </a:solidFill>
                           <a:latin typeface="Arial"/>
                         </a:rPr>
-                        <a:t>insulin icodec</a:t>
+                        <a:t>Food effect · DDI · relative bioavailability · organ impairment · mass balance / ADME · thorough QT · healthy volunteers</a:t>
                       </a:r>
                     </a:p>
                   </a:txBody>
@@ -13257,13 +13263,13 @@
                         </a:spcAft>
                       </a:pPr>
                       <a:r>
-                        <a:rPr sz="1000" b="0">
+                        <a:rPr sz="950" b="0">
                           <a:solidFill>
                             <a:srgbClr val="1C222B"/>
                           </a:solidFill>
                           <a:latin typeface="Arial"/>
                         </a:rPr>
-                        <a:t>84</a:t>
+                        <a:t>FIRST author — they designed and ran it</a:t>
                       </a:r>
                     </a:p>
                   </a:txBody>
@@ -13273,6 +13279,8 @@
                     </a:solidFill>
                   </a:tcPr>
                 </a:tc>
+              </a:tr>
+              <a:tr h="420624">
                 <a:tc>
                   <a:txBody>
                     <a:bodyPr wrap="square"/>
@@ -13287,7 +13295,7 @@
                         </a:spcAft>
                       </a:pPr>
                       <a:r>
-                        <a:rPr sz="1000" b="0">
+                        <a:rPr sz="950" b="0">
                           <a:solidFill>
                             <a:srgbClr val="1C222B"/>
                           </a:solidFill>
@@ -13317,45 +13325,13 @@
                         </a:spcAft>
                       </a:pPr>
                       <a:r>
-                        <a:rPr sz="1000" b="0">
+                        <a:rPr sz="950" b="0">
                           <a:solidFill>
                             <a:srgbClr val="1C222B"/>
                           </a:solidFill>
                           <a:latin typeface="Arial"/>
                         </a:rPr>
-                        <a:t>Novo Nordisk — 2 posters, Poster Session I</a:t>
-                      </a:r>
-                    </a:p>
-                  </a:txBody>
-                  <a:tcPr marL="54864" marR="54864" marT="18288" marB="18288" anchor="ctr">
-                    <a:solidFill>
-                      <a:srgbClr val="FFFFFF"/>
-                    </a:solidFill>
-                  </a:tcPr>
-                </a:tc>
-              </a:tr>
-              <a:tr h="329184">
-                <a:tc>
-                  <a:txBody>
-                    <a:bodyPr wrap="square"/>
-                    <a:lstStyle/>
-                    <a:p>
-                      <a:pPr>
-                        <a:spcBef>
-                          <a:spcPts val="0"/>
-                        </a:spcBef>
-                        <a:spcAft>
-                          <a:spcPts val="0"/>
-                        </a:spcAft>
-                      </a:pPr>
-                      <a:r>
-                        <a:rPr sz="1000" b="0">
-                          <a:solidFill>
-                            <a:srgbClr val="1C222B"/>
-                          </a:solidFill>
-                          <a:latin typeface="Arial"/>
-                        </a:rPr>
-                        <a:t>2</a:t>
+                        <a:t>Population PK · exposure–response · PBPK</a:t>
                       </a:r>
                     </a:p>
                   </a:txBody>
@@ -13379,13 +13355,13 @@
                         </a:spcAft>
                       </a:pPr>
                       <a:r>
-                        <a:rPr sz="1000" b="0">
+                        <a:rPr sz="950" b="0">
                           <a:solidFill>
                             <a:srgbClr val="1C222B"/>
                           </a:solidFill>
                           <a:latin typeface="Arial"/>
                         </a:rPr>
-                        <a:t>orforglipron</a:t>
+                        <a:t>First or senior author</a:t>
                       </a:r>
                     </a:p>
                   </a:txBody>
@@ -13395,6 +13371,8 @@
                     </a:solidFill>
                   </a:tcPr>
                 </a:tc>
+              </a:tr>
+              <a:tr h="420624">
                 <a:tc>
                   <a:txBody>
                     <a:bodyPr wrap="square"/>
@@ -13409,37 +13387,7 @@
                         </a:spcAft>
                       </a:pPr>
                       <a:r>
-                        <a:rPr sz="1000" b="0">
-                          <a:solidFill>
-                            <a:srgbClr val="1C222B"/>
-                          </a:solidFill>
-                          <a:latin typeface="Arial"/>
-                        </a:rPr>
-                        <a:t>84</a:t>
-                      </a:r>
-                    </a:p>
-                  </a:txBody>
-                  <a:tcPr marL="54864" marR="54864" marT="18288" marB="18288" anchor="ctr">
-                    <a:solidFill>
-                      <a:srgbClr val="FFFFFF"/>
-                    </a:solidFill>
-                  </a:tcPr>
-                </a:tc>
-                <a:tc>
-                  <a:txBody>
-                    <a:bodyPr wrap="square"/>
-                    <a:lstStyle/>
-                    <a:p>
-                      <a:pPr>
-                        <a:spcBef>
-                          <a:spcPts val="0"/>
-                        </a:spcBef>
-                        <a:spcAft>
-                          <a:spcPts val="0"/>
-                        </a:spcAft>
-                      </a:pPr>
-                      <a:r>
-                        <a:rPr sz="1000" b="0">
+                        <a:rPr sz="950" b="0">
                           <a:solidFill>
                             <a:srgbClr val="1C222B"/>
                           </a:solidFill>
@@ -13469,45 +13417,13 @@
                         </a:spcAft>
                       </a:pPr>
                       <a:r>
-                        <a:rPr sz="1000" b="0">
+                        <a:rPr sz="950" b="0">
                           <a:solidFill>
                             <a:srgbClr val="1C222B"/>
                           </a:solidFill>
                           <a:latin typeface="Arial"/>
                         </a:rPr>
-                        <a:t>Brian Moser (Eli Lilly) — Poster PI-072, Session I, 3/4 5:00 PM</a:t>
-                      </a:r>
-                    </a:p>
-                  </a:txBody>
-                  <a:tcPr marL="54864" marR="54864" marT="18288" marB="18288" anchor="ctr">
-                    <a:solidFill>
-                      <a:srgbClr val="FFFFFF"/>
-                    </a:solidFill>
-                  </a:tcPr>
-                </a:tc>
-              </a:tr>
-              <a:tr h="329184">
-                <a:tc>
-                  <a:txBody>
-                    <a:bodyPr wrap="square"/>
-                    <a:lstStyle/>
-                    <a:p>
-                      <a:pPr>
-                        <a:spcBef>
-                          <a:spcPts val="0"/>
-                        </a:spcBef>
-                        <a:spcAft>
-                          <a:spcPts val="0"/>
-                        </a:spcAft>
-                      </a:pPr>
-                      <a:r>
-                        <a:rPr sz="1000" b="0">
-                          <a:solidFill>
-                            <a:srgbClr val="1C222B"/>
-                          </a:solidFill>
-                          <a:latin typeface="Arial"/>
-                        </a:rPr>
-                        <a:t>5</a:t>
+                        <a:t>Dose escalation / first-in-human  (fallback only)</a:t>
                       </a:r>
                     </a:p>
                   </a:txBody>
@@ -13531,255 +13447,13 @@
                         </a:spcAft>
                       </a:pPr>
                       <a:r>
-                        <a:rPr sz="1000" b="0">
+                        <a:rPr sz="950" b="0">
                           <a:solidFill>
                             <a:srgbClr val="1C222B"/>
                           </a:solidFill>
                           <a:latin typeface="Arial"/>
                         </a:rPr>
-                        <a:t>iberdomide</a:t>
-                      </a:r>
-                    </a:p>
-                  </a:txBody>
-                  <a:tcPr marL="54864" marR="54864" marT="18288" marB="18288" anchor="ctr">
-                    <a:solidFill>
-                      <a:srgbClr val="FFFFFF"/>
-                    </a:solidFill>
-                  </a:tcPr>
-                </a:tc>
-                <a:tc>
-                  <a:txBody>
-                    <a:bodyPr wrap="square"/>
-                    <a:lstStyle/>
-                    <a:p>
-                      <a:pPr>
-                        <a:spcBef>
-                          <a:spcPts val="0"/>
-                        </a:spcBef>
-                        <a:spcAft>
-                          <a:spcPts val="0"/>
-                        </a:spcAft>
-                      </a:pPr>
-                      <a:r>
-                        <a:rPr sz="1000" b="0">
-                          <a:solidFill>
-                            <a:srgbClr val="1C222B"/>
-                          </a:solidFill>
-                          <a:latin typeface="Arial"/>
-                        </a:rPr>
-                        <a:t>74</a:t>
-                      </a:r>
-                    </a:p>
-                  </a:txBody>
-                  <a:tcPr marL="54864" marR="54864" marT="18288" marB="18288" anchor="ctr">
-                    <a:solidFill>
-                      <a:srgbClr val="FFFFFF"/>
-                    </a:solidFill>
-                  </a:tcPr>
-                </a:tc>
-                <a:tc>
-                  <a:txBody>
-                    <a:bodyPr wrap="square"/>
-                    <a:lstStyle/>
-                    <a:p>
-                      <a:pPr>
-                        <a:spcBef>
-                          <a:spcPts val="0"/>
-                        </a:spcBef>
-                        <a:spcAft>
-                          <a:spcPts val="0"/>
-                        </a:spcAft>
-                      </a:pPr>
-                      <a:r>
-                        <a:rPr sz="1000" b="0">
-                          <a:solidFill>
-                            <a:srgbClr val="1C222B"/>
-                          </a:solidFill>
-                          <a:latin typeface="Arial"/>
-                        </a:rPr>
-                        <a:t>3</a:t>
-                      </a:r>
-                    </a:p>
-                  </a:txBody>
-                  <a:tcPr marL="54864" marR="54864" marT="18288" marB="18288" anchor="ctr">
-                    <a:solidFill>
-                      <a:srgbClr val="FFFFFF"/>
-                    </a:solidFill>
-                  </a:tcPr>
-                </a:tc>
-                <a:tc>
-                  <a:txBody>
-                    <a:bodyPr wrap="square"/>
-                    <a:lstStyle/>
-                    <a:p>
-                      <a:pPr>
-                        <a:spcBef>
-                          <a:spcPts val="0"/>
-                        </a:spcBef>
-                        <a:spcAft>
-                          <a:spcPts val="0"/>
-                        </a:spcAft>
-                      </a:pPr>
-                      <a:r>
-                        <a:rPr sz="1000" b="0">
-                          <a:solidFill>
-                            <a:srgbClr val="1C222B"/>
-                          </a:solidFill>
-                          <a:latin typeface="Arial"/>
-                        </a:rPr>
-                        <a:t>Can Liu (Bristol-Myers Squibb) — Poster PI-066, Session I, 3/4 5:00 PM</a:t>
-                      </a:r>
-                    </a:p>
-                  </a:txBody>
-                  <a:tcPr marL="54864" marR="54864" marT="18288" marB="18288" anchor="ctr">
-                    <a:solidFill>
-                      <a:srgbClr val="FFFFFF"/>
-                    </a:solidFill>
-                  </a:tcPr>
-                </a:tc>
-              </a:tr>
-              <a:tr h="329184">
-                <a:tc>
-                  <a:txBody>
-                    <a:bodyPr wrap="square"/>
-                    <a:lstStyle/>
-                    <a:p>
-                      <a:pPr>
-                        <a:spcBef>
-                          <a:spcPts val="0"/>
-                        </a:spcBef>
-                        <a:spcAft>
-                          <a:spcPts val="0"/>
-                        </a:spcAft>
-                      </a:pPr>
-                      <a:r>
-                        <a:rPr sz="1000" b="0">
-                          <a:solidFill>
-                            <a:srgbClr val="1C222B"/>
-                          </a:solidFill>
-                          <a:latin typeface="Arial"/>
-                        </a:rPr>
-                        <a:t>12</a:t>
-                      </a:r>
-                    </a:p>
-                  </a:txBody>
-                  <a:tcPr marL="54864" marR="54864" marT="18288" marB="18288" anchor="ctr">
-                    <a:solidFill>
-                      <a:srgbClr val="FFFFFF"/>
-                    </a:solidFill>
-                  </a:tcPr>
-                </a:tc>
-                <a:tc>
-                  <a:txBody>
-                    <a:bodyPr wrap="square"/>
-                    <a:lstStyle/>
-                    <a:p>
-                      <a:pPr>
-                        <a:spcBef>
-                          <a:spcPts val="0"/>
-                        </a:spcBef>
-                        <a:spcAft>
-                          <a:spcPts val="0"/>
-                        </a:spcAft>
-                      </a:pPr>
-                      <a:r>
-                        <a:rPr sz="1000" b="0">
-                          <a:solidFill>
-                            <a:srgbClr val="1C222B"/>
-                          </a:solidFill>
-                          <a:latin typeface="Arial"/>
-                        </a:rPr>
-                        <a:t>bulevirtide</a:t>
-                      </a:r>
-                    </a:p>
-                  </a:txBody>
-                  <a:tcPr marL="54864" marR="54864" marT="18288" marB="18288" anchor="ctr">
-                    <a:solidFill>
-                      <a:srgbClr val="FFFFFF"/>
-                    </a:solidFill>
-                  </a:tcPr>
-                </a:tc>
-                <a:tc>
-                  <a:txBody>
-                    <a:bodyPr wrap="square"/>
-                    <a:lstStyle/>
-                    <a:p>
-                      <a:pPr>
-                        <a:spcBef>
-                          <a:spcPts val="0"/>
-                        </a:spcBef>
-                        <a:spcAft>
-                          <a:spcPts val="0"/>
-                        </a:spcAft>
-                      </a:pPr>
-                      <a:r>
-                        <a:rPr sz="1000" b="0">
-                          <a:solidFill>
-                            <a:srgbClr val="1C222B"/>
-                          </a:solidFill>
-                          <a:latin typeface="Arial"/>
-                        </a:rPr>
-                        <a:t>56</a:t>
-                      </a:r>
-                    </a:p>
-                  </a:txBody>
-                  <a:tcPr marL="54864" marR="54864" marT="18288" marB="18288" anchor="ctr">
-                    <a:solidFill>
-                      <a:srgbClr val="FFFFFF"/>
-                    </a:solidFill>
-                  </a:tcPr>
-                </a:tc>
-                <a:tc>
-                  <a:txBody>
-                    <a:bodyPr wrap="square"/>
-                    <a:lstStyle/>
-                    <a:p>
-                      <a:pPr>
-                        <a:spcBef>
-                          <a:spcPts val="0"/>
-                        </a:spcBef>
-                        <a:spcAft>
-                          <a:spcPts val="0"/>
-                        </a:spcAft>
-                      </a:pPr>
-                      <a:r>
-                        <a:rPr sz="1000" b="0">
-                          <a:solidFill>
-                            <a:srgbClr val="1C222B"/>
-                          </a:solidFill>
-                          <a:latin typeface="Arial"/>
-                        </a:rPr>
-                        <a:t>6</a:t>
-                      </a:r>
-                    </a:p>
-                  </a:txBody>
-                  <a:tcPr marL="54864" marR="54864" marT="18288" marB="18288" anchor="ctr">
-                    <a:solidFill>
-                      <a:srgbClr val="FFFFFF"/>
-                    </a:solidFill>
-                  </a:tcPr>
-                </a:tc>
-                <a:tc>
-                  <a:txBody>
-                    <a:bodyPr wrap="square"/>
-                    <a:lstStyle/>
-                    <a:p>
-                      <a:pPr>
-                        <a:spcBef>
-                          <a:spcPts val="0"/>
-                        </a:spcBef>
-                        <a:spcAft>
-                          <a:spcPts val="0"/>
-                        </a:spcAft>
-                      </a:pPr>
-                      <a:r>
-                        <a:rPr sz="1000" b="0">
-                          <a:solidFill>
-                            <a:srgbClr val="1C222B"/>
-                          </a:solidFill>
-                          <a:latin typeface="Arial"/>
-                        </a:rPr>
-                        <a:t>Jin Zhou (Gilead Sciences) — Poster PI-014, Session I, 3/4 5:00 PM</a:t>
+                        <a:t>ANYWHERE — first and last are the treating clinicians</a:t>
                       </a:r>
                     </a:p>
                   </a:txBody>
@@ -13802,8 +13476,8 @@
         </p:nvSpPr>
         <p:spPr>
           <a:xfrm>
-            <a:off x="566928" y="3977639"/>
-            <a:ext cx="5623560" cy="2103120"/>
+            <a:off x="566928" y="3657600"/>
+            <a:ext cx="5623560" cy="1920240"/>
           </a:xfrm>
           <a:prstGeom prst="rect">
             <a:avLst/>
@@ -13846,8 +13520,8 @@
         </p:nvSpPr>
         <p:spPr>
           <a:xfrm>
-            <a:off x="749808" y="4114800"/>
-            <a:ext cx="5257800" cy="1828800"/>
+            <a:off x="731520" y="3776472"/>
+            <a:ext cx="5294376" cy="1691640"/>
           </a:xfrm>
           <a:prstGeom prst="rect">
             <a:avLst/>
@@ -13865,101 +13539,17 @@
                 <a:spcPts val="0"/>
               </a:spcBef>
               <a:spcAft>
-                <a:spcPts val="800"/>
-              </a:spcAft>
-            </a:pPr>
-            <a:r>
-              <a:rPr sz="1150" b="1" i="0">
+                <a:spcPts val="600"/>
+              </a:spcAft>
+            </a:pPr>
+            <a:r>
+              <a:rPr sz="900" b="1" i="0">
                 <a:solidFill>
                   <a:srgbClr val="1F4E79"/>
                 </a:solidFill>
                 <a:latin typeface="Arial"/>
               </a:rPr>
-              <a:t>HOW A MATCH IS MADE — three signals, strongest first</a:t>
-            </a:r>
-          </a:p>
-          <a:p>
-            <a:pPr>
-              <a:lnSpc>
-                <a:spcPct val="108000"/>
-              </a:lnSpc>
-              <a:spcAft>
-                <a:spcPts val="700"/>
-              </a:spcAft>
-            </a:pPr>
-            <a:r>
-              <a:rPr sz="1050" b="1">
-                <a:solidFill>
-                  <a:srgbClr val="1C222B"/>
-                </a:solidFill>
-                <a:latin typeface="Arial"/>
-              </a:rPr>
-              <a:t>1.  Drug named in the poster title — </a:t>
-            </a:r>
-            <a:r>
-              <a:rPr sz="1050">
-                <a:solidFill>
-                  <a:srgbClr val="535C69"/>
-                </a:solidFill>
-                <a:latin typeface="Arial"/>
-              </a:rPr>
-              <a:t>the work is about this drug</a:t>
-            </a:r>
-          </a:p>
-          <a:p>
-            <a:pPr>
-              <a:lnSpc>
-                <a:spcPct val="108000"/>
-              </a:lnSpc>
-              <a:spcAft>
-                <a:spcPts val="700"/>
-              </a:spcAft>
-            </a:pPr>
-            <a:r>
-              <a:rPr sz="1050" b="1">
-                <a:solidFill>
-                  <a:srgbClr val="1C222B"/>
-                </a:solidFill>
-                <a:latin typeface="Arial"/>
-              </a:rPr>
-              <a:t>2.  Drug named in the abstract text — </a:t>
-            </a:r>
-            <a:r>
-              <a:rPr sz="1050">
-                <a:solidFill>
-                  <a:srgbClr val="535C69"/>
-                </a:solidFill>
-                <a:latin typeface="Arial"/>
-              </a:rPr>
-              <a:t>often catches what the title omits</a:t>
-            </a:r>
-          </a:p>
-          <a:p>
-            <a:pPr>
-              <a:lnSpc>
-                <a:spcPct val="108000"/>
-              </a:lnSpc>
-              <a:spcAft>
-                <a:spcPts val="700"/>
-              </a:spcAft>
-            </a:pPr>
-            <a:r>
-              <a:rPr sz="1050" b="1">
-                <a:solidFill>
-                  <a:srgbClr val="1C222B"/>
-                </a:solidFill>
-                <a:latin typeface="Arial"/>
-              </a:rPr>
-              <a:t>3.  Sponsor is the presenting organisation — </a:t>
-            </a:r>
-            <a:r>
-              <a:rPr sz="1050">
-                <a:solidFill>
-                  <a:srgbClr val="535C69"/>
-                </a:solidFill>
-                <a:latin typeface="Arial"/>
-              </a:rPr>
-              <a:t>that company is in the room, even if the poster is on something else</a:t>
+              <a:t>THE CASE THAT PROVES IT ISN'T JUST POSITION</a:t>
             </a:r>
           </a:p>
           <a:p>
@@ -13971,6 +13561,94 @@
                 <a:spcPts val="0"/>
               </a:spcBef>
               <a:spcAft>
+                <a:spcPts val="600"/>
+              </a:spcAft>
+            </a:pPr>
+            <a:r>
+              <a:rPr sz="1000" b="0" i="0">
+                <a:solidFill>
+                  <a:srgbClr val="535C69"/>
+                </a:solidFill>
+                <a:latin typeface="Arial"/>
+              </a:rPr>
+              <a:t>Pivekimab sunirine, an AbbVie oncology ADC. The Phase 1 paper has 24 authors.</a:t>
+            </a:r>
+          </a:p>
+          <a:p>
+            <a:pPr algn="l">
+              <a:lnSpc>
+                <a:spcPct val="105000"/>
+              </a:lnSpc>
+              <a:spcBef>
+                <a:spcPts val="0"/>
+              </a:spcBef>
+              <a:spcAft>
+                <a:spcPts val="300"/>
+              </a:spcAft>
+            </a:pPr>
+            <a:r>
+              <a:rPr sz="950" b="0" i="0">
+                <a:solidFill>
+                  <a:srgbClr val="9B3A3A"/>
+                </a:solidFill>
+                <a:latin typeface="Arial"/>
+              </a:rPr>
+              <a:t>first    Naveen Pemmaraju — MD Anderson</a:t>
+            </a:r>
+          </a:p>
+          <a:p>
+            <a:pPr algn="l">
+              <a:lnSpc>
+                <a:spcPct val="105000"/>
+              </a:lnSpc>
+              <a:spcBef>
+                <a:spcPts val="0"/>
+              </a:spcBef>
+              <a:spcAft>
+                <a:spcPts val="300"/>
+              </a:spcAft>
+            </a:pPr>
+            <a:r>
+              <a:rPr sz="950" b="0" i="0">
+                <a:solidFill>
+                  <a:srgbClr val="1E6B52"/>
+                </a:solidFill>
+                <a:latin typeface="Arial"/>
+              </a:rPr>
+              <a:t>20–22    Yining Du · Sribalaji Lakshmikanthan · Jalaja Potluri — AbbVie</a:t>
+            </a:r>
+          </a:p>
+          <a:p>
+            <a:pPr algn="l">
+              <a:lnSpc>
+                <a:spcPct val="105000"/>
+              </a:lnSpc>
+              <a:spcBef>
+                <a:spcPts val="0"/>
+              </a:spcBef>
+              <a:spcAft>
+                <a:spcPts val="300"/>
+              </a:spcAft>
+            </a:pPr>
+            <a:r>
+              <a:rPr sz="950" b="0" i="0">
+                <a:solidFill>
+                  <a:srgbClr val="9B3A3A"/>
+                </a:solidFill>
+                <a:latin typeface="Arial"/>
+              </a:rPr>
+              <a:t>last     Naval G Daver — MD Anderson</a:t>
+            </a:r>
+          </a:p>
+          <a:p>
+            <a:pPr algn="l">
+              <a:lnSpc>
+                <a:spcPct val="110000"/>
+              </a:lnSpc>
+              <a:spcBef>
+                <a:spcPts val="0"/>
+              </a:spcBef>
+              <a:spcAft>
                 <a:spcPts val="0"/>
               </a:spcAft>
             </a:pPr>
@@ -13981,7 +13659,7 @@
                 </a:solidFill>
                 <a:latin typeface="Arial"/>
               </a:rPr>
-              <a:t>Reported as leads to check, never as facts: a poster naming a drug does not prove the person who owns the molecule is standing there.</a:t>
+              <a:t>The tool returns the three AbbVie authors and neither clinician. Pinned as a test so it cannot regress.</a:t>
             </a:r>
           </a:p>
         </p:txBody>
@@ -13994,8 +13672,8 @@
         </p:nvSpPr>
         <p:spPr>
           <a:xfrm>
-            <a:off x="6464808" y="3977639"/>
-            <a:ext cx="5159959" cy="2103120"/>
+            <a:off x="6464808" y="3657600"/>
+            <a:ext cx="5159959" cy="1920240"/>
           </a:xfrm>
           <a:prstGeom prst="roundRect">
             <a:avLst>
@@ -14040,8 +13718,8 @@
         </p:nvSpPr>
         <p:spPr>
           <a:xfrm>
-            <a:off x="6647688" y="4114800"/>
-            <a:ext cx="4794199" cy="1828800"/>
+            <a:off x="6629400" y="3776472"/>
+            <a:ext cx="4830775" cy="1691640"/>
           </a:xfrm>
           <a:prstGeom prst="rect">
             <a:avLst/>
@@ -14063,15 +13741,82 @@
               </a:spcAft>
             </a:pPr>
             <a:r>
-              <a:rPr sz="950" b="1" i="0">
+              <a:rPr sz="900" b="1" i="0">
                 <a:solidFill>
                   <a:srgbClr val="1F4E79"/>
                 </a:solidFill>
                 <a:latin typeface="Arial"/>
               </a:rPr>
-              <a:t>THE ONE MANUAL STEP</a:t>
-            </a:r>
-          </a:p>
+              <a:t>TWO THINGS IT HAS TO GET RIGHT</a:t>
+            </a:r>
+          </a:p>
+          <a:p>
+            <a:pPr algn="l">
+              <a:lnSpc>
+                <a:spcPct val="110000"/>
+              </a:lnSpc>
+              <a:spcBef>
+                <a:spcPts val="0"/>
+              </a:spcBef>
+              <a:spcAft>
+                <a:spcPts val="600"/>
+              </a:spcAft>
+            </a:pPr>
+            <a:r>
+              <a:rPr sz="950" b="0" i="0">
+                <a:solidFill>
+                  <a:srgbClr val="1C222B"/>
+                </a:solidFill>
+                <a:latin typeface="Arial"/>
+              </a:rPr>
+              <a:t>Acquisitions. Tebipenem is approved to GSK, but every paper comes out of Spero, whom GSK bought. Baxdrostat is AstraZeneca; the papers are CinCor. The tool infers the company that actually ran the programme.</a:t>
+            </a:r>
+          </a:p>
+          <a:p>
+            <a:pPr algn="l">
+              <a:lnSpc>
+                <a:spcPct val="110000"/>
+              </a:lnSpc>
+              <a:spcBef>
+                <a:spcPts val="0"/>
+              </a:spcBef>
+              <a:spcAft>
+                <a:spcPts val="0"/>
+              </a:spcAft>
+            </a:pPr>
+            <a:r>
+              <a:rPr sz="950" b="0" i="0">
+                <a:solidFill>
+                  <a:srgbClr val="1C222B"/>
+                </a:solidFill>
+                <a:latin typeface="Arial"/>
+              </a:rPr>
+              <a:t>People move. PubMed records the affiliation at publication, so it reports where the work was done and adds “now at …”.</a:t>
+            </a:r>
+          </a:p>
+        </p:txBody>
+      </p:sp>
+      <p:sp>
+        <p:nvSpPr>
+          <p:cNvPr id="12" name="TextBox 11"/>
+          <p:cNvSpPr txBox="1"/>
+          <p:nvPr/>
+        </p:nvSpPr>
+        <p:spPr>
+          <a:xfrm>
+            <a:off x="566928" y="5742432"/>
+            <a:ext cx="11057839" cy="329184"/>
+          </a:xfrm>
+          <a:prstGeom prst="rect">
+            <a:avLst/>
+          </a:prstGeom>
+          <a:noFill/>
+        </p:spPr>
+        <p:txBody>
+          <a:bodyPr wrap="square" lIns="0" rIns="0" tIns="0" bIns="0">
+            <a:spAutoFit/>
+          </a:bodyPr>
+          <a:lstStyle/>
           <a:p>
             <a:pPr algn="l">
               <a:lnSpc>
@@ -14081,46 +13826,24 @@
                 <a:spcPts val="0"/>
               </a:spcBef>
               <a:spcAft>
-                <a:spcPts val="800"/>
-              </a:spcAft>
-            </a:pPr>
-            <a:r>
-              <a:rPr sz="1050" b="0" i="0">
-                <a:solidFill>
-                  <a:srgbClr val="1C222B"/>
-                </a:solidFill>
-                <a:latin typeface="Arial"/>
-              </a:rPr>
-              <a:t>The ASCPT programme is rendered in the browser by EventScribe and cannot be fetched by any script — every URL returns the same empty shell. So once a year you export it yourself and point the tool at the sheet.</a:t>
-            </a:r>
-          </a:p>
-          <a:p>
-            <a:pPr algn="l">
-              <a:lnSpc>
-                <a:spcPct val="112000"/>
-              </a:lnSpc>
-              <a:spcBef>
-                <a:spcPts val="0"/>
-              </a:spcBef>
-              <a:spcAft>
-                <a:spcPts val="0"/>
-              </a:spcAft>
-            </a:pPr>
-            <a:r>
-              <a:rPr sz="1050" b="0" i="0">
-                <a:solidFill>
-                  <a:srgbClr val="535C69"/>
-                </a:solidFill>
-                <a:latin typeface="Arial"/>
-              </a:rPr>
-              <a:t>Include the Presenting Author columns and you get names. Without them, matching still works on company and title — you just lose the person.</a:t>
-            </a:r>
-          </a:p>
-        </p:txBody>
-      </p:sp>
-      <p:sp>
-        <p:nvSpPr>
-          <p:cNvPr id="12" name="TextBox 11"/>
+                <a:spcPts val="0"/>
+              </a:spcAft>
+            </a:pPr>
+            <a:r>
+              <a:rPr sz="1100" b="1" i="0">
+                <a:solidFill>
+                  <a:srgbClr val="1F4E79"/>
+                </a:solidFill>
+                <a:latin typeface="Arial"/>
+              </a:rPr>
+              <a:t>Result on the live queue: 24 of 27 candidates get a named clinical pharmacologist, 20 of them at the sponsor or the company that ran the programme — against a baseline where most read NEEDS LOOKUP.</a:t>
+            </a:r>
+          </a:p>
+        </p:txBody>
+      </p:sp>
+      <p:sp>
+        <p:nvSpPr>
+          <p:cNvPr id="13" name="TextBox 12"/>
           <p:cNvSpPr txBox="1"/>
           <p:nvPr/>
         </p:nvSpPr>
@@ -14162,7 +13885,7 @@
       </p:sp>
       <p:sp>
         <p:nvSpPr>
-          <p:cNvPr id="13" name="TextBox 12"/>
+          <p:cNvPr id="14" name="TextBox 13"/>
           <p:cNvSpPr txBox="1"/>
           <p:nvPr/>
         </p:nvSpPr>
@@ -15858,19 +15581,19 @@
                 </a:solidFill>
                 <a:latin typeface="Arial"/>
               </a:rPr>
-              <a:t>HANDING IT TO SOMEONE ELSE</a:t>
+              <a:t>HANDING IT TO SOMEONE ELSE — ONE FILE</a:t>
             </a:r>
           </a:p>
           <a:p>
             <a:pPr algn="l">
               <a:lnSpc>
-                <a:spcPct val="120000"/>
+                <a:spcPct val="115000"/>
               </a:lnSpc>
               <a:spcBef>
                 <a:spcPts val="0"/>
               </a:spcBef>
               <a:spcAft>
-                <a:spcPts val="800"/>
+                <a:spcPts val="600"/>
               </a:spcAft>
             </a:pPr>
             <a:r>
@@ -15880,9 +15603,30 @@
                 </a:solidFill>
                 <a:latin typeface="Arial"/>
               </a:rPr>
-              <a:t>1.  Copy the folder (not settings.json, cache or output).
-2.  They double-click CTS MOA Engine.
-3.  There is no step 3.</a:t>
+              <a:t>Send a single 92 KB file. Nothing to unzip, no folder to keep together.</a:t>
+            </a:r>
+          </a:p>
+          <a:p>
+            <a:pPr algn="l">
+              <a:lnSpc>
+                <a:spcPct val="125000"/>
+              </a:lnSpc>
+              <a:spcBef>
+                <a:spcPts val="0"/>
+              </a:spcBef>
+              <a:spcAft>
+                <a:spcPts val="600"/>
+              </a:spcAft>
+            </a:pPr>
+            <a:r>
+              <a:rPr sz="1000" b="1" i="0">
+                <a:solidFill>
+                  <a:srgbClr val="1F4E79"/>
+                </a:solidFill>
+                <a:latin typeface="Arial"/>
+              </a:rPr>
+              <a:t>CTS MOA Engine.command     Mac
+CTS MOA Engine.bat             Windows</a:t>
             </a:r>
           </a:p>
           <a:p>
@@ -15894,7 +15638,7 @@
                 <a:spcPts val="0"/>
               </a:spcBef>
               <a:spcAft>
-                <a:spcPts val="0"/>
+                <a:spcPts val="600"/>
               </a:spcAft>
             </a:pPr>
             <a:r>
@@ -15904,7 +15648,29 @@
                 </a:solidFill>
                 <a:latin typeface="Arial"/>
               </a:rPr>
-              <a:t>No account, no credential, no API key, no server. Everything stays on the machine it runs on. The only requirement is Python 3.</a:t>
+              <a:t>The whole engine is compressed inside and loaded from memory. On first run it creates a working folder beside itself for input and results.</a:t>
+            </a:r>
+          </a:p>
+          <a:p>
+            <a:pPr algn="l">
+              <a:lnSpc>
+                <a:spcPct val="112000"/>
+              </a:lnSpc>
+              <a:spcBef>
+                <a:spcPts val="0"/>
+              </a:spcBef>
+              <a:spcAft>
+                <a:spcPts val="0"/>
+              </a:spcAft>
+            </a:pPr>
+            <a:r>
+              <a:rPr sz="1000" b="0" i="0">
+                <a:solidFill>
+                  <a:srgbClr val="535C69"/>
+                </a:solidFill>
+                <a:latin typeface="Arial"/>
+              </a:rPr>
+              <a:t>No account, no credential, no API key, no server. The only requirement is Python 3.</a:t>
             </a:r>
           </a:p>
         </p:txBody>

--- a/How the MOA sourcing engine works.pptx
+++ b/How the MOA sourcing engine works.pptx
@@ -5882,7 +5882,7 @@
                 </a:solidFill>
                 <a:latin typeface="Arial"/>
               </a:rPr>
-              <a:t>Should the dossier be shared with the whole AE group before the meeting?</a:t>
+              <a:t>Should the outreach list be shared with the whole AE group?</a:t>
             </a:r>
           </a:p>
         </p:txBody>
@@ -9031,7 +9031,7 @@
                 </a:solidFill>
                 <a:latin typeface="Arial"/>
               </a:rPr>
-              <a:t>· dossier + drafts</a:t>
+              <a:t>· outreach list + drafts</a:t>
             </a:r>
           </a:p>
         </p:txBody>
@@ -14902,7 +14902,7 @@
                 </a:solidFill>
                 <a:latin typeface="Arial"/>
               </a:rPr>
-              <a:t>EVERYDAY USE</a:t>
+              <a:t>EVERYDAY USE — most people just press the buttons; this is the same thing</a:t>
             </a:r>
           </a:p>
         </p:txBody>
@@ -14983,13 +14983,13 @@
               </a:spcAft>
             </a:pPr>
             <a:r>
-              <a:rPr sz="1100" b="0" i="0">
+              <a:rPr sz="1050" b="0" i="0">
                 <a:solidFill>
                   <a:srgbClr val="E8ECF1"/>
                 </a:solidFill>
                 <a:latin typeface="Menlo"/>
               </a:rPr>
-              <a:t>$ ./moa-engine check              # verify everything; writes nothing</a:t>
+              <a:t>$ python3 moa_engine.py check           # verify everything; writes nothing</a:t>
             </a:r>
           </a:p>
           <a:p>
@@ -15005,13 +15005,13 @@
               </a:spcAft>
             </a:pPr>
             <a:r>
-              <a:rPr sz="1100" b="0" i="0">
+              <a:rPr sz="1050" b="0" i="0">
                 <a:solidFill>
                   <a:srgbClr val="E8ECF1"/>
                 </a:solidFill>
                 <a:latin typeface="Menlo"/>
               </a:rPr>
-              <a:t>$ ./moa-engine scan --days 120    # preview candidates; writes nothing</a:t>
+              <a:t>$ python3 moa_engine.py scan --days 120 # preview candidates; writes nothing</a:t>
             </a:r>
           </a:p>
           <a:p>
@@ -15027,13 +15027,13 @@
               </a:spcAft>
             </a:pPr>
             <a:r>
-              <a:rPr sz="1100" b="0" i="0">
+              <a:rPr sz="1050" b="0" i="0">
                 <a:solidFill>
                   <a:srgbClr val="E8ECF1"/>
                 </a:solidFill>
                 <a:latin typeface="Menlo"/>
               </a:rPr>
-              <a:t>$ ./moa-engine update --go        # add new candidates to the queue</a:t>
+              <a:t>$ python3 moa_engine.py update --go     # add new candidates to the queue</a:t>
             </a:r>
           </a:p>
           <a:p>
@@ -15049,13 +15049,13 @@
               </a:spcAft>
             </a:pPr>
             <a:r>
-              <a:rPr sz="1100" b="0" i="0">
+              <a:rPr sz="1050" b="0" i="0">
                 <a:solidFill>
                   <a:srgbClr val="E8ECF1"/>
                 </a:solidFill>
                 <a:latin typeface="Menlo"/>
               </a:rPr>
-              <a:t>$ ./moa-engine dossier --go       # build the ASCPT dossier</a:t>
+              <a:t>$ python3 moa_engine.py dossier --go    # build the outreach list</a:t>
             </a:r>
           </a:p>
           <a:p>
@@ -15071,13 +15071,13 @@
               </a:spcAft>
             </a:pPr>
             <a:r>
-              <a:rPr sz="1100" b="0" i="0">
+              <a:rPr sz="1050" b="0" i="0">
                 <a:solidFill>
                   <a:srgbClr val="E8ECF1"/>
                 </a:solidFill>
                 <a:latin typeface="Menlo"/>
               </a:rPr>
-              <a:t>$ ./moa-engine invites --go       # draft the letters, once you've read it</a:t>
+              <a:t>$ python3 moa_engine.py invites --go    # draft the letters, once read</a:t>
             </a:r>
           </a:p>
         </p:txBody>
@@ -15200,13 +15200,13 @@
               </a:spcAft>
             </a:pPr>
             <a:r>
-              <a:rPr sz="1100" b="0" i="0">
+              <a:rPr sz="1050" b="0" i="0">
                 <a:solidFill>
                   <a:srgbClr val="E8ECF1"/>
                 </a:solidFill>
                 <a:latin typeface="Menlo"/>
               </a:rPr>
-              <a:t>$ ./moa-engine start              # monthly, 7th at 09:17</a:t>
+              <a:t>$ python3 moa_engine.py start           # monthly, 7th at 09:17</a:t>
             </a:r>
           </a:p>
           <a:p>
@@ -15222,13 +15222,13 @@
               </a:spcAft>
             </a:pPr>
             <a:r>
-              <a:rPr sz="1100" b="0" i="0">
+              <a:rPr sz="1050" b="0" i="0">
                 <a:solidFill>
                   <a:srgbClr val="E8ECF1"/>
                 </a:solidFill>
                 <a:latin typeface="Menlo"/>
               </a:rPr>
-              <a:t>$ ./moa-engine status             # on or off?</a:t>
+              <a:t>$ python3 moa_engine.py status          # on or off?</a:t>
             </a:r>
           </a:p>
           <a:p>
@@ -15244,13 +15244,13 @@
               </a:spcAft>
             </a:pPr>
             <a:r>
-              <a:rPr sz="1100" b="0" i="0">
+              <a:rPr sz="1050" b="0" i="0">
                 <a:solidFill>
                   <a:srgbClr val="E8ECF1"/>
                 </a:solidFill>
                 <a:latin typeface="Menlo"/>
               </a:rPr>
-              <a:t>$ ./moa-engine stop               # removes it completely</a:t>
+              <a:t>$ python3 moa_engine.py stop            # removes it completely</a:t>
             </a:r>
           </a:p>
         </p:txBody>
@@ -15603,7 +15603,7 @@
                 </a:solidFill>
                 <a:latin typeface="Arial"/>
               </a:rPr>
-              <a:t>Send a single 92 KB file. Nothing to unzip, no folder to keep together.</a:t>
+              <a:t>Send one file, ~93 KB. Nothing to unzip, and it is both the app and the command line.</a:t>
             </a:r>
           </a:p>
           <a:p>
@@ -15625,8 +15625,8 @@
                 </a:solidFill>
                 <a:latin typeface="Arial"/>
               </a:rPr>
-              <a:t>CTS MOA Engine.command     Mac
-CTS MOA Engine.bat             Windows</a:t>
+              <a:t>SEND THIS/CTS MOA Engine.command     Mac
+SEND THIS/CTS MOA Engine.bat             Windows</a:t>
             </a:r>
           </a:p>
           <a:p>
@@ -15648,7 +15648,7 @@
                 </a:solidFill>
                 <a:latin typeface="Arial"/>
               </a:rPr>
-              <a:t>The whole engine is compressed inside and loaded from memory. On first run it creates a working folder beside itself for input and results.</a:t>
+              <a:t>Compressed inside and loaded from memory. First run creates a working folder beside it for input and results.</a:t>
             </a:r>
           </a:p>
           <a:p>

--- a/How the MOA sourcing engine works.pptx
+++ b/How the MOA sourcing engine works.pptx
@@ -5284,7 +5284,7 @@
                 </a:solidFill>
                 <a:latin typeface="Arial"/>
               </a:rPr>
-              <a:t>— people move; the tool flags it but cannot confirm where they are now</a:t>
+              <a:t>— people move. The tool flags a likely move but cannot confirm a current employer. LinkedIn is not an option: its terms prohibit automated access and it refuses non-browser requests outright, so this stays a manual check</a:t>
             </a:r>
           </a:p>
           <a:p>
@@ -15309,7 +15309,7 @@
         <p:spPr>
           <a:xfrm>
             <a:off x="7607808" y="1298448"/>
-            <a:ext cx="4016959" cy="2331720"/>
+            <a:ext cx="4016959" cy="2651760"/>
           </a:xfrm>
           <a:prstGeom prst="rect">
             <a:avLst/>
@@ -15394,22 +15394,22 @@
               </a:spcAft>
             </a:pPr>
             <a:r>
-              <a:rPr sz="1050" b="1">
+              <a:rPr sz="950" b="1">
                 <a:solidFill>
                   <a:srgbClr val="1C222B"/>
                 </a:solidFill>
                 <a:latin typeface="Arial"/>
               </a:rPr>
-              <a:t>✓  Dry run by default — </a:t>
-            </a:r>
-            <a:r>
-              <a:rPr sz="1050">
+              <a:t>✓  Runs on its own — </a:t>
+            </a:r>
+            <a:r>
+              <a:rPr sz="950">
                 <a:solidFill>
                   <a:srgbClr val="535C69"/>
                 </a:solidFill>
                 <a:latin typeface="Arial"/>
               </a:rPr>
-              <a:t>nothing is written without --go</a:t>
+              <a:t>no AI, no Claude, no account, no API key, no server — Python 3 and a connection to the FDA and PubMed, nothing else</a:t>
             </a:r>
           </a:p>
           <a:p>
@@ -15422,22 +15422,22 @@
               </a:spcAft>
             </a:pPr>
             <a:r>
-              <a:rPr sz="1050" b="1">
+              <a:rPr sz="950" b="1">
                 <a:solidFill>
                   <a:srgbClr val="1C222B"/>
                 </a:solidFill>
                 <a:latin typeface="Arial"/>
               </a:rPr>
-              <a:t>✓  No email, ever — </a:t>
-            </a:r>
-            <a:r>
-              <a:rPr sz="1050">
+              <a:t>✓  Dry run by default — </a:t>
+            </a:r>
+            <a:r>
+              <a:rPr sz="950">
                 <a:solidFill>
                   <a:srgbClr val="535C69"/>
                 </a:solidFill>
                 <a:latin typeface="Arial"/>
               </a:rPr>
-              <a:t>invitations are drafted for you to send</a:t>
+              <a:t>nothing is written without --go</a:t>
             </a:r>
           </a:p>
           <a:p>
@@ -15450,22 +15450,22 @@
               </a:spcAft>
             </a:pPr>
             <a:r>
-              <a:rPr sz="1050" b="1">
+              <a:rPr sz="950" b="1">
                 <a:solidFill>
                   <a:srgbClr val="1C222B"/>
                 </a:solidFill>
                 <a:latin typeface="Arial"/>
               </a:rPr>
-              <a:t>✓  Your columns are yours — </a:t>
-            </a:r>
-            <a:r>
-              <a:rPr sz="1050">
+              <a:t>✓  No email, ever — </a:t>
+            </a:r>
+            <a:r>
+              <a:rPr sz="950">
                 <a:solidFill>
                   <a:srgbClr val="535C69"/>
                 </a:solidFill>
                 <a:latin typeface="Arial"/>
               </a:rPr>
-              <a:t>AE owner and Status are never overwritten</a:t>
+              <a:t>invitations are drafted for you to send</a:t>
             </a:r>
           </a:p>
           <a:p>
@@ -15478,16 +15478,44 @@
               </a:spcAft>
             </a:pPr>
             <a:r>
-              <a:rPr sz="1050" b="1">
+              <a:rPr sz="950" b="1">
                 <a:solidFill>
                   <a:srgbClr val="1C222B"/>
                 </a:solidFill>
                 <a:latin typeface="Arial"/>
               </a:rPr>
+              <a:t>✓  Your columns are yours — </a:t>
+            </a:r>
+            <a:r>
+              <a:rPr sz="950">
+                <a:solidFill>
+                  <a:srgbClr val="535C69"/>
+                </a:solidFill>
+                <a:latin typeface="Arial"/>
+              </a:rPr>
+              <a:t>AE owner and Status are never overwritten</a:t>
+            </a:r>
+          </a:p>
+          <a:p>
+            <a:pPr>
+              <a:lnSpc>
+                <a:spcPct val="108000"/>
+              </a:lnSpc>
+              <a:spcAft>
+                <a:spcPts val="700"/>
+              </a:spcAft>
+            </a:pPr>
+            <a:r>
+              <a:rPr sz="950" b="1">
+                <a:solidFill>
+                  <a:srgbClr val="1C222B"/>
+                </a:solidFill>
+                <a:latin typeface="Arial"/>
+              </a:rPr>
               <a:t>✓  No guessed contacts — </a:t>
             </a:r>
             <a:r>
-              <a:rPr sz="1050">
+              <a:rPr sz="950">
                 <a:solidFill>
                   <a:srgbClr val="535C69"/>
                 </a:solidFill>
@@ -15506,8 +15534,8 @@
         </p:nvSpPr>
         <p:spPr>
           <a:xfrm>
-            <a:off x="7607808" y="3767328"/>
-            <a:ext cx="4016959" cy="2286000"/>
+            <a:off x="7607808" y="4078224"/>
+            <a:ext cx="4016959" cy="1975104"/>
           </a:xfrm>
           <a:prstGeom prst="roundRect">
             <a:avLst>
@@ -15552,8 +15580,8 @@
         </p:nvSpPr>
         <p:spPr>
           <a:xfrm>
-            <a:off x="7790688" y="3913632"/>
-            <a:ext cx="3651199" cy="2011680"/>
+            <a:off x="7790688" y="4206240"/>
+            <a:ext cx="3651199" cy="1737360"/>
           </a:xfrm>
           <a:prstGeom prst="rect">
             <a:avLst/>
@@ -15603,7 +15631,7 @@
                 </a:solidFill>
                 <a:latin typeface="Arial"/>
               </a:rPr>
-              <a:t>Send one file, ~93 KB. Nothing to unzip, and it is both the app and the command line.</a:t>
+              <a:t>Send one file, ~93 KB. Both the app and the command line.</a:t>
             </a:r>
           </a:p>
           <a:p>
@@ -15648,7 +15676,7 @@
                 </a:solidFill>
                 <a:latin typeface="Arial"/>
               </a:rPr>
-              <a:t>Compressed inside and loaded from memory. First run creates a working folder beside it for input and results.</a:t>
+              <a:t>Loaded from memory; first run creates a working folder beside it.</a:t>
             </a:r>
           </a:p>
           <a:p>
